--- a/lectures/lecture30_31/oo_design.pptx
+++ b/lectures/lecture30_31/oo_design.pptx
@@ -6,14 +6,15 @@
   </p:sldMasterIdLst>
   <p:sldIdLst>
     <p:sldId id="256" r:id="rId2"/>
-    <p:sldId id="257" r:id="rId3"/>
-    <p:sldId id="260" r:id="rId4"/>
-    <p:sldId id="258" r:id="rId5"/>
-    <p:sldId id="261" r:id="rId6"/>
-    <p:sldId id="259" r:id="rId7"/>
-    <p:sldId id="263" r:id="rId8"/>
-    <p:sldId id="262" r:id="rId9"/>
-    <p:sldId id="264" r:id="rId10"/>
+    <p:sldId id="265" r:id="rId3"/>
+    <p:sldId id="259" r:id="rId4"/>
+    <p:sldId id="257" r:id="rId5"/>
+    <p:sldId id="260" r:id="rId6"/>
+    <p:sldId id="258" r:id="rId7"/>
+    <p:sldId id="261" r:id="rId8"/>
+    <p:sldId id="263" r:id="rId9"/>
+    <p:sldId id="262" r:id="rId10"/>
+    <p:sldId id="264" r:id="rId11"/>
   </p:sldIdLst>
   <p:sldSz cx="12192000" cy="6858000"/>
   <p:notesSz cx="6858000" cy="9144000"/>
@@ -132,8 +133,8 @@
 <pc:chgInfo xmlns:a="http://schemas.openxmlformats.org/drawingml/2006/main" xmlns:r="http://schemas.openxmlformats.org/officeDocument/2006/relationships" xmlns:ac="http://schemas.microsoft.com/office/drawing/2013/main/command" xmlns:pc="http://schemas.microsoft.com/office/powerpoint/2013/main/command">
   <pc:docChgLst>
     <pc:chgData name="Toby Donaldson" userId="2e6e5431-bb17-4c41-9985-d39c50d83c73" providerId="ADAL" clId="{F31BC264-820E-54C4-A6D1-F92AF9CC222E}"/>
-    <pc:docChg chg="undo redo custSel addSld delSld modSld">
-      <pc:chgData name="Toby Donaldson" userId="2e6e5431-bb17-4c41-9985-d39c50d83c73" providerId="ADAL" clId="{F31BC264-820E-54C4-A6D1-F92AF9CC222E}" dt="2026-07-30T18:51:03.657" v="5462" actId="20577"/>
+    <pc:docChg chg="undo redo custSel addSld delSld modSld sldOrd">
+      <pc:chgData name="Toby Donaldson" userId="2e6e5431-bb17-4c41-9985-d39c50d83c73" providerId="ADAL" clId="{F31BC264-820E-54C4-A6D1-F92AF9CC222E}" dt="2026-07-31T04:00:52.245" v="5834" actId="113"/>
       <pc:docMkLst>
         <pc:docMk/>
       </pc:docMkLst>
@@ -259,8 +260,8 @@
           <pc:sldMk cId="2385381810" sldId="259"/>
         </pc:sldMkLst>
       </pc:sldChg>
-      <pc:sldChg chg="addSp modSp new mod">
-        <pc:chgData name="Toby Donaldson" userId="2e6e5431-bb17-4c41-9985-d39c50d83c73" providerId="ADAL" clId="{F31BC264-820E-54C4-A6D1-F92AF9CC222E}" dt="2026-07-30T18:23:29.293" v="2545" actId="20577"/>
+      <pc:sldChg chg="addSp modSp new mod ord">
+        <pc:chgData name="Toby Donaldson" userId="2e6e5431-bb17-4c41-9985-d39c50d83c73" providerId="ADAL" clId="{F31BC264-820E-54C4-A6D1-F92AF9CC222E}" dt="2026-07-31T03:58:09.644" v="5579" actId="20578"/>
         <pc:sldMkLst>
           <pc:docMk/>
           <pc:sldMk cId="2902054552" sldId="259"/>
@@ -306,13 +307,13 @@
         </pc:sldMkLst>
       </pc:sldChg>
       <pc:sldChg chg="modSp add del mod">
-        <pc:chgData name="Toby Donaldson" userId="2e6e5431-bb17-4c41-9985-d39c50d83c73" providerId="ADAL" clId="{F31BC264-820E-54C4-A6D1-F92AF9CC222E}" dt="2026-07-30T18:04:23.252" v="1018" actId="113"/>
+        <pc:chgData name="Toby Donaldson" userId="2e6e5431-bb17-4c41-9985-d39c50d83c73" providerId="ADAL" clId="{F31BC264-820E-54C4-A6D1-F92AF9CC222E}" dt="2026-07-31T04:00:52.245" v="5834" actId="113"/>
         <pc:sldMkLst>
           <pc:docMk/>
           <pc:sldMk cId="4043563937" sldId="260"/>
         </pc:sldMkLst>
         <pc:spChg chg="mod">
-          <ac:chgData name="Toby Donaldson" userId="2e6e5431-bb17-4c41-9985-d39c50d83c73" providerId="ADAL" clId="{F31BC264-820E-54C4-A6D1-F92AF9CC222E}" dt="2026-07-30T18:04:23.252" v="1018" actId="113"/>
+          <ac:chgData name="Toby Donaldson" userId="2e6e5431-bb17-4c41-9985-d39c50d83c73" providerId="ADAL" clId="{F31BC264-820E-54C4-A6D1-F92AF9CC222E}" dt="2026-07-31T04:00:52.245" v="5834" actId="113"/>
           <ac:spMkLst>
             <pc:docMk/>
             <pc:sldMk cId="4043563937" sldId="260"/>
@@ -437,6 +438,29 @@
             <pc:docMk/>
             <pc:sldMk cId="2445586752" sldId="264"/>
             <ac:spMk id="3" creationId="{7E21A46B-0A28-FA40-ECB8-861888BE3874}"/>
+          </ac:spMkLst>
+        </pc:spChg>
+      </pc:sldChg>
+      <pc:sldChg chg="modSp new mod">
+        <pc:chgData name="Toby Donaldson" userId="2e6e5431-bb17-4c41-9985-d39c50d83c73" providerId="ADAL" clId="{F31BC264-820E-54C4-A6D1-F92AF9CC222E}" dt="2026-07-31T04:00:25.198" v="5833" actId="20577"/>
+        <pc:sldMkLst>
+          <pc:docMk/>
+          <pc:sldMk cId="125165516" sldId="265"/>
+        </pc:sldMkLst>
+        <pc:spChg chg="mod">
+          <ac:chgData name="Toby Donaldson" userId="2e6e5431-bb17-4c41-9985-d39c50d83c73" providerId="ADAL" clId="{F31BC264-820E-54C4-A6D1-F92AF9CC222E}" dt="2026-07-31T03:57:30.849" v="5504" actId="20577"/>
+          <ac:spMkLst>
+            <pc:docMk/>
+            <pc:sldMk cId="125165516" sldId="265"/>
+            <ac:spMk id="2" creationId="{B039738F-2775-77A7-0EA6-51731C44228B}"/>
+          </ac:spMkLst>
+        </pc:spChg>
+        <pc:spChg chg="mod">
+          <ac:chgData name="Toby Donaldson" userId="2e6e5431-bb17-4c41-9985-d39c50d83c73" providerId="ADAL" clId="{F31BC264-820E-54C4-A6D1-F92AF9CC222E}" dt="2026-07-31T04:00:25.198" v="5833" actId="20577"/>
+          <ac:spMkLst>
+            <pc:docMk/>
+            <pc:sldMk cId="125165516" sldId="265"/>
+            <ac:spMk id="3" creationId="{FDC9096B-0CFC-895A-AE56-1257B9527CEC}"/>
           </ac:spMkLst>
         </pc:spChg>
       </pc:sldChg>
@@ -3754,7 +3778,537 @@
 </p:sld>
 </file>
 
+<file path=ppt/slides/slide10.xml><?xml version="1.0" encoding="utf-8"?>
+<p:sld xmlns:a="http://schemas.openxmlformats.org/drawingml/2006/main" xmlns:r="http://schemas.openxmlformats.org/officeDocument/2006/relationships" xmlns:p="http://schemas.openxmlformats.org/presentationml/2006/main">
+  <p:cSld>
+    <p:spTree>
+      <p:nvGrpSpPr>
+        <p:cNvPr id="1" name=""/>
+        <p:cNvGrpSpPr/>
+        <p:nvPr/>
+      </p:nvGrpSpPr>
+      <p:grpSpPr>
+        <a:xfrm>
+          <a:off x="0" y="0"/>
+          <a:ext cx="0" cy="0"/>
+          <a:chOff x="0" y="0"/>
+          <a:chExt cx="0" cy="0"/>
+        </a:xfrm>
+      </p:grpSpPr>
+      <p:sp>
+        <p:nvSpPr>
+          <p:cNvPr id="2" name="Title 1">
+            <a:extLst>
+              <a:ext uri="{FF2B5EF4-FFF2-40B4-BE49-F238E27FC236}">
+                <a16:creationId xmlns:a16="http://schemas.microsoft.com/office/drawing/2014/main" id="{3EBA8F85-96D6-E82D-7342-193135DF3D5E}"/>
+              </a:ext>
+            </a:extLst>
+          </p:cNvPr>
+          <p:cNvSpPr>
+            <a:spLocks noGrp="1"/>
+          </p:cNvSpPr>
+          <p:nvPr>
+            <p:ph type="title"/>
+          </p:nvPr>
+        </p:nvSpPr>
+        <p:spPr/>
+        <p:txBody>
+          <a:bodyPr/>
+          <a:lstStyle/>
+          <a:p>
+            <a:r>
+              <a:rPr lang="en-US" dirty="0"/>
+              <a:t>Example: Unix File API</a:t>
+            </a:r>
+          </a:p>
+        </p:txBody>
+      </p:sp>
+      <p:sp>
+        <p:nvSpPr>
+          <p:cNvPr id="3" name="Content Placeholder 2">
+            <a:extLst>
+              <a:ext uri="{FF2B5EF4-FFF2-40B4-BE49-F238E27FC236}">
+                <a16:creationId xmlns:a16="http://schemas.microsoft.com/office/drawing/2014/main" id="{7E21A46B-0A28-FA40-ECB8-861888BE3874}"/>
+              </a:ext>
+            </a:extLst>
+          </p:cNvPr>
+          <p:cNvSpPr>
+            <a:spLocks noGrp="1"/>
+          </p:cNvSpPr>
+          <p:nvPr>
+            <p:ph idx="1"/>
+          </p:nvPr>
+        </p:nvSpPr>
+        <p:spPr/>
+        <p:txBody>
+          <a:bodyPr/>
+          <a:lstStyle/>
+          <a:p>
+            <a:pPr marL="0" indent="0">
+              <a:buNone/>
+            </a:pPr>
+            <a:r>
+              <a:rPr lang="en-US" dirty="0"/>
+              <a:t>What code should you use to read and write files?</a:t>
+            </a:r>
+          </a:p>
+          <a:p>
+            <a:pPr marL="0" indent="0">
+              <a:buNone/>
+            </a:pPr>
+            <a:r>
+              <a:rPr lang="en-US" dirty="0"/>
+              <a:t>Practically all programs use files, so how do you make everyone happy?</a:t>
+            </a:r>
+          </a:p>
+          <a:p>
+            <a:pPr marL="0" indent="0">
+              <a:buNone/>
+            </a:pPr>
+            <a:r>
+              <a:rPr lang="en-US" dirty="0"/>
+              <a:t>The Unix file API is a famously simple interface:</a:t>
+            </a:r>
+          </a:p>
+          <a:p>
+            <a:pPr marL="0" indent="0">
+              <a:buNone/>
+            </a:pPr>
+            <a:r>
+              <a:rPr lang="en-US" b="1" dirty="0"/>
+              <a:t>open</a:t>
+            </a:r>
+            <a:r>
+              <a:rPr lang="en-US" dirty="0"/>
+              <a:t>, </a:t>
+            </a:r>
+            <a:r>
+              <a:rPr lang="en-US" b="1" dirty="0"/>
+              <a:t>read</a:t>
+            </a:r>
+            <a:r>
+              <a:rPr lang="en-US" dirty="0"/>
+              <a:t>, </a:t>
+            </a:r>
+            <a:r>
+              <a:rPr lang="en-US" b="1" dirty="0"/>
+              <a:t>write</a:t>
+            </a:r>
+            <a:r>
+              <a:rPr lang="en-US" dirty="0"/>
+              <a:t>, </a:t>
+            </a:r>
+            <a:r>
+              <a:rPr lang="en-US" b="1" dirty="0" err="1"/>
+              <a:t>lseek</a:t>
+            </a:r>
+            <a:r>
+              <a:rPr lang="en-US" dirty="0"/>
+              <a:t>, </a:t>
+            </a:r>
+            <a:r>
+              <a:rPr lang="en-US" b="1" dirty="0"/>
+              <a:t>close</a:t>
+            </a:r>
+          </a:p>
+          <a:p>
+            <a:pPr marL="0" indent="0">
+              <a:buNone/>
+            </a:pPr>
+            <a:r>
+              <a:rPr lang="en-US" dirty="0"/>
+              <a:t>It has been around since the 1970s with no major change.</a:t>
+            </a:r>
+            <a:br>
+              <a:rPr lang="en-US" dirty="0"/>
+            </a:br>
+            <a:r>
+              <a:rPr lang="en-US" dirty="0"/>
+              <a:t>But the underlying implementations have changed drastically.</a:t>
+            </a:r>
+          </a:p>
+          <a:p>
+            <a:pPr marL="0" indent="0">
+              <a:buNone/>
+            </a:pPr>
+            <a:r>
+              <a:rPr lang="en-US" dirty="0"/>
+              <a:t>Think about designing an interface for files: it is not obvious that these functions work so </a:t>
+            </a:r>
+            <a:r>
+              <a:rPr lang="en-US"/>
+              <a:t>well in so many cases.</a:t>
+            </a:r>
+            <a:endParaRPr lang="en-US" dirty="0"/>
+          </a:p>
+        </p:txBody>
+      </p:sp>
+    </p:spTree>
+    <p:extLst>
+      <p:ext uri="{BB962C8B-B14F-4D97-AF65-F5344CB8AC3E}">
+        <p14:creationId xmlns:p14="http://schemas.microsoft.com/office/powerpoint/2010/main" val="2445586752"/>
+      </p:ext>
+    </p:extLst>
+  </p:cSld>
+  <p:clrMapOvr>
+    <a:masterClrMapping/>
+  </p:clrMapOvr>
+</p:sld>
+</file>
+
 <file path=ppt/slides/slide2.xml><?xml version="1.0" encoding="utf-8"?>
+<p:sld xmlns:a="http://schemas.openxmlformats.org/drawingml/2006/main" xmlns:r="http://schemas.openxmlformats.org/officeDocument/2006/relationships" xmlns:p="http://schemas.openxmlformats.org/presentationml/2006/main">
+  <p:cSld>
+    <p:spTree>
+      <p:nvGrpSpPr>
+        <p:cNvPr id="1" name=""/>
+        <p:cNvGrpSpPr/>
+        <p:nvPr/>
+      </p:nvGrpSpPr>
+      <p:grpSpPr>
+        <a:xfrm>
+          <a:off x="0" y="0"/>
+          <a:ext cx="0" cy="0"/>
+          <a:chOff x="0" y="0"/>
+          <a:chExt cx="0" cy="0"/>
+        </a:xfrm>
+      </p:grpSpPr>
+      <p:sp>
+        <p:nvSpPr>
+          <p:cNvPr id="2" name="Title 1">
+            <a:extLst>
+              <a:ext uri="{FF2B5EF4-FFF2-40B4-BE49-F238E27FC236}">
+                <a16:creationId xmlns:a16="http://schemas.microsoft.com/office/drawing/2014/main" id="{B039738F-2775-77A7-0EA6-51731C44228B}"/>
+              </a:ext>
+            </a:extLst>
+          </p:cNvPr>
+          <p:cNvSpPr>
+            <a:spLocks noGrp="1"/>
+          </p:cNvSpPr>
+          <p:nvPr>
+            <p:ph type="title"/>
+          </p:nvPr>
+        </p:nvSpPr>
+        <p:spPr/>
+        <p:txBody>
+          <a:bodyPr/>
+          <a:lstStyle/>
+          <a:p>
+            <a:r>
+              <a:rPr lang="en-US" dirty="0"/>
+              <a:t>Object-Oriented Design Principles</a:t>
+            </a:r>
+          </a:p>
+        </p:txBody>
+      </p:sp>
+      <p:sp>
+        <p:nvSpPr>
+          <p:cNvPr id="3" name="Content Placeholder 2">
+            <a:extLst>
+              <a:ext uri="{FF2B5EF4-FFF2-40B4-BE49-F238E27FC236}">
+                <a16:creationId xmlns:a16="http://schemas.microsoft.com/office/drawing/2014/main" id="{FDC9096B-0CFC-895A-AE56-1257B9527CEC}"/>
+              </a:ext>
+            </a:extLst>
+          </p:cNvPr>
+          <p:cNvSpPr>
+            <a:spLocks noGrp="1"/>
+          </p:cNvSpPr>
+          <p:nvPr>
+            <p:ph idx="1"/>
+          </p:nvPr>
+        </p:nvSpPr>
+        <p:spPr/>
+        <p:txBody>
+          <a:bodyPr/>
+          <a:lstStyle/>
+          <a:p>
+            <a:pPr marL="0" indent="0">
+              <a:buNone/>
+            </a:pPr>
+            <a:r>
+              <a:rPr lang="en-US" dirty="0"/>
+              <a:t>Modularity</a:t>
+            </a:r>
+          </a:p>
+          <a:p>
+            <a:pPr lvl="1"/>
+            <a:r>
+              <a:rPr lang="en-US" dirty="0"/>
+              <a:t>Organize programs into individual components</a:t>
+            </a:r>
+          </a:p>
+          <a:p>
+            <a:pPr marL="0" indent="0">
+              <a:buNone/>
+            </a:pPr>
+            <a:r>
+              <a:rPr lang="en-US" dirty="0"/>
+              <a:t>Abstraction</a:t>
+            </a:r>
+          </a:p>
+          <a:p>
+            <a:pPr lvl="1"/>
+            <a:r>
+              <a:rPr lang="en-US" dirty="0"/>
+              <a:t>Boil things down to the key ideas</a:t>
+            </a:r>
+          </a:p>
+          <a:p>
+            <a:pPr marL="0" indent="0">
+              <a:buNone/>
+            </a:pPr>
+            <a:r>
+              <a:rPr lang="en-US" dirty="0"/>
+              <a:t>Encapsulation</a:t>
+            </a:r>
+          </a:p>
+          <a:p>
+            <a:pPr lvl="1"/>
+            <a:r>
+              <a:rPr lang="en-US" dirty="0"/>
+              <a:t>Intentionally hide details of implementation</a:t>
+            </a:r>
+          </a:p>
+          <a:p>
+            <a:pPr marL="0" indent="0">
+              <a:buNone/>
+            </a:pPr>
+            <a:r>
+              <a:rPr lang="en-US" dirty="0"/>
+              <a:t>Hierarchical decomposition</a:t>
+            </a:r>
+          </a:p>
+          <a:p>
+            <a:pPr lvl="1"/>
+            <a:r>
+              <a:rPr lang="en-US" dirty="0"/>
+              <a:t>Organize hierarchically related components using inheritance</a:t>
+            </a:r>
+          </a:p>
+        </p:txBody>
+      </p:sp>
+    </p:spTree>
+    <p:extLst>
+      <p:ext uri="{BB962C8B-B14F-4D97-AF65-F5344CB8AC3E}">
+        <p14:creationId xmlns:p14="http://schemas.microsoft.com/office/powerpoint/2010/main" val="125165516"/>
+      </p:ext>
+    </p:extLst>
+  </p:cSld>
+  <p:clrMapOvr>
+    <a:masterClrMapping/>
+  </p:clrMapOvr>
+</p:sld>
+</file>
+
+<file path=ppt/slides/slide3.xml><?xml version="1.0" encoding="utf-8"?>
+<p:sld xmlns:a="http://schemas.openxmlformats.org/drawingml/2006/main" xmlns:r="http://schemas.openxmlformats.org/officeDocument/2006/relationships" xmlns:p="http://schemas.openxmlformats.org/presentationml/2006/main">
+  <p:cSld>
+    <p:spTree>
+      <p:nvGrpSpPr>
+        <p:cNvPr id="1" name=""/>
+        <p:cNvGrpSpPr/>
+        <p:nvPr/>
+      </p:nvGrpSpPr>
+      <p:grpSpPr>
+        <a:xfrm>
+          <a:off x="0" y="0"/>
+          <a:ext cx="0" cy="0"/>
+          <a:chOff x="0" y="0"/>
+          <a:chExt cx="0" cy="0"/>
+        </a:xfrm>
+      </p:grpSpPr>
+      <p:sp>
+        <p:nvSpPr>
+          <p:cNvPr id="2" name="Title 1">
+            <a:extLst>
+              <a:ext uri="{FF2B5EF4-FFF2-40B4-BE49-F238E27FC236}">
+                <a16:creationId xmlns:a16="http://schemas.microsoft.com/office/drawing/2014/main" id="{FFA7CFA6-B31B-49F9-260A-3BE29B070960}"/>
+              </a:ext>
+            </a:extLst>
+          </p:cNvPr>
+          <p:cNvSpPr>
+            <a:spLocks noGrp="1"/>
+          </p:cNvSpPr>
+          <p:nvPr>
+            <p:ph type="title"/>
+          </p:nvPr>
+        </p:nvSpPr>
+        <p:spPr/>
+        <p:txBody>
+          <a:bodyPr/>
+          <a:lstStyle/>
+          <a:p>
+            <a:r>
+              <a:rPr lang="en-US" dirty="0"/>
+              <a:t>Modularity</a:t>
+            </a:r>
+          </a:p>
+        </p:txBody>
+      </p:sp>
+      <p:sp>
+        <p:nvSpPr>
+          <p:cNvPr id="3" name="Content Placeholder 2">
+            <a:extLst>
+              <a:ext uri="{FF2B5EF4-FFF2-40B4-BE49-F238E27FC236}">
+                <a16:creationId xmlns:a16="http://schemas.microsoft.com/office/drawing/2014/main" id="{A522A2D5-CBBD-0FB0-C691-7341D5A601A5}"/>
+              </a:ext>
+            </a:extLst>
+          </p:cNvPr>
+          <p:cNvSpPr>
+            <a:spLocks noGrp="1"/>
+          </p:cNvSpPr>
+          <p:nvPr>
+            <p:ph idx="1"/>
+          </p:nvPr>
+        </p:nvSpPr>
+        <p:spPr>
+          <a:xfrm>
+            <a:off x="838200" y="1825625"/>
+            <a:ext cx="9180007" cy="4351338"/>
+          </a:xfrm>
+        </p:spPr>
+        <p:txBody>
+          <a:bodyPr>
+            <a:normAutofit lnSpcReduction="10000"/>
+          </a:bodyPr>
+          <a:lstStyle/>
+          <a:p>
+            <a:pPr marL="0" indent="0">
+              <a:buNone/>
+            </a:pPr>
+            <a:r>
+              <a:rPr lang="en-US" b="1" dirty="0"/>
+              <a:t>Modularity</a:t>
+            </a:r>
+            <a:r>
+              <a:rPr lang="en-US" dirty="0"/>
+              <a:t> is the idea of dividing a big thing into multiple small components.</a:t>
+            </a:r>
+          </a:p>
+          <a:p>
+            <a:pPr marL="0" indent="0">
+              <a:buNone/>
+            </a:pPr>
+            <a:endParaRPr lang="en-US" dirty="0"/>
+          </a:p>
+          <a:p>
+            <a:pPr marL="0" indent="0">
+              <a:buNone/>
+            </a:pPr>
+            <a:r>
+              <a:rPr lang="en-US" dirty="0"/>
+              <a:t>E.g. Lego models are designed from small bricks.</a:t>
+            </a:r>
+          </a:p>
+          <a:p>
+            <a:pPr marL="0" indent="0">
+              <a:buNone/>
+            </a:pPr>
+            <a:r>
+              <a:rPr lang="en-US" dirty="0"/>
+              <a:t>E.g. Electronics uses standard modules like wires, resistors, capacitors etc.</a:t>
+            </a:r>
+          </a:p>
+          <a:p>
+            <a:pPr marL="0" indent="0">
+              <a:buNone/>
+            </a:pPr>
+            <a:r>
+              <a:rPr lang="en-US" dirty="0"/>
+              <a:t>E.g. Computers have the CPU, main memory, I/O, etc.</a:t>
+            </a:r>
+          </a:p>
+          <a:p>
+            <a:pPr marL="0" indent="0">
+              <a:buNone/>
+            </a:pPr>
+            <a:endParaRPr lang="en-US" dirty="0"/>
+          </a:p>
+          <a:p>
+            <a:pPr marL="0" indent="0">
+              <a:buNone/>
+            </a:pPr>
+            <a:r>
+              <a:rPr lang="en-US" dirty="0"/>
+              <a:t>Finding the best way to modularize a system can be very challenging!</a:t>
+            </a:r>
+          </a:p>
+        </p:txBody>
+      </p:sp>
+      <p:pic>
+        <p:nvPicPr>
+          <p:cNvPr id="4" name="Picture 3" descr="LEGO® Parts - Brick Creation">
+            <a:extLst>
+              <a:ext uri="{FF2B5EF4-FFF2-40B4-BE49-F238E27FC236}">
+                <a16:creationId xmlns:a16="http://schemas.microsoft.com/office/drawing/2014/main" id="{F66B33F4-48A3-95DA-0585-FC0F56C5989D}"/>
+              </a:ext>
+            </a:extLst>
+          </p:cNvPr>
+          <p:cNvPicPr>
+            <a:picLocks noChangeAspect="1"/>
+          </p:cNvPicPr>
+          <p:nvPr/>
+        </p:nvPicPr>
+        <p:blipFill>
+          <a:blip r:embed="rId2"/>
+          <a:stretch>
+            <a:fillRect/>
+          </a:stretch>
+        </p:blipFill>
+        <p:spPr>
+          <a:xfrm>
+            <a:off x="10018207" y="1690688"/>
+            <a:ext cx="1965709" cy="1965709"/>
+          </a:xfrm>
+          <a:prstGeom prst="rect">
+            <a:avLst/>
+          </a:prstGeom>
+        </p:spPr>
+      </p:pic>
+      <p:pic>
+        <p:nvPicPr>
+          <p:cNvPr id="5" name="Picture 4" descr="Electronic component - Wikipedia">
+            <a:extLst>
+              <a:ext uri="{FF2B5EF4-FFF2-40B4-BE49-F238E27FC236}">
+                <a16:creationId xmlns:a16="http://schemas.microsoft.com/office/drawing/2014/main" id="{B1243D96-F2CF-0B1E-C84C-D02CA7B6506D}"/>
+              </a:ext>
+            </a:extLst>
+          </p:cNvPr>
+          <p:cNvPicPr>
+            <a:picLocks noChangeAspect="1"/>
+          </p:cNvPicPr>
+          <p:nvPr/>
+        </p:nvPicPr>
+        <p:blipFill>
+          <a:blip r:embed="rId3"/>
+          <a:stretch>
+            <a:fillRect/>
+          </a:stretch>
+        </p:blipFill>
+        <p:spPr>
+          <a:xfrm>
+            <a:off x="9651755" y="3539070"/>
+            <a:ext cx="2540245" cy="1747155"/>
+          </a:xfrm>
+          <a:prstGeom prst="rect">
+            <a:avLst/>
+          </a:prstGeom>
+        </p:spPr>
+      </p:pic>
+    </p:spTree>
+    <p:extLst>
+      <p:ext uri="{BB962C8B-B14F-4D97-AF65-F5344CB8AC3E}">
+        <p14:creationId xmlns:p14="http://schemas.microsoft.com/office/powerpoint/2010/main" val="2902054552"/>
+      </p:ext>
+    </p:extLst>
+  </p:cSld>
+  <p:clrMapOvr>
+    <a:masterClrMapping/>
+  </p:clrMapOvr>
+</p:sld>
+</file>
+
+<file path=ppt/slides/slide4.xml><?xml version="1.0" encoding="utf-8"?>
 <p:sld xmlns:a="http://schemas.openxmlformats.org/drawingml/2006/main" xmlns:r="http://schemas.openxmlformats.org/officeDocument/2006/relationships" xmlns:p="http://schemas.openxmlformats.org/presentationml/2006/main">
   <p:cSld>
     <p:spTree>
@@ -3940,7 +4494,7 @@
 </p:sld>
 </file>
 
-<file path=ppt/slides/slide3.xml><?xml version="1.0" encoding="utf-8"?>
+<file path=ppt/slides/slide5.xml><?xml version="1.0" encoding="utf-8"?>
 <p:sld xmlns:a="http://schemas.openxmlformats.org/drawingml/2006/main" xmlns:r="http://schemas.openxmlformats.org/officeDocument/2006/relationships" xmlns:p="http://schemas.openxmlformats.org/presentationml/2006/main">
   <p:cSld>
     <p:spTree>
@@ -4038,7 +4592,15 @@
             </a:pPr>
             <a:r>
               <a:rPr lang="en-US" dirty="0"/>
-              <a:t>Abstracting data structures gives you ADTs.</a:t>
+              <a:t>Abstracting data structures gives you </a:t>
+            </a:r>
+            <a:r>
+              <a:rPr lang="en-US" b="1" dirty="0"/>
+              <a:t>ADT</a:t>
+            </a:r>
+            <a:r>
+              <a:rPr lang="en-US" dirty="0"/>
+              <a:t>s.</a:t>
             </a:r>
           </a:p>
           <a:p>
@@ -4092,7 +4654,7 @@
 </p:sld>
 </file>
 
-<file path=ppt/slides/slide4.xml><?xml version="1.0" encoding="utf-8"?>
+<file path=ppt/slides/slide6.xml><?xml version="1.0" encoding="utf-8"?>
 <p:sld xmlns:a="http://schemas.openxmlformats.org/drawingml/2006/main" xmlns:r="http://schemas.openxmlformats.org/officeDocument/2006/relationships" xmlns:p="http://schemas.openxmlformats.org/presentationml/2006/main">
   <p:cSld>
     <p:spTree>
@@ -4288,7 +4850,7 @@
 </p:sld>
 </file>
 
-<file path=ppt/slides/slide5.xml><?xml version="1.0" encoding="utf-8"?>
+<file path=ppt/slides/slide7.xml><?xml version="1.0" encoding="utf-8"?>
 <p:sld xmlns:a="http://schemas.openxmlformats.org/drawingml/2006/main" xmlns:r="http://schemas.openxmlformats.org/officeDocument/2006/relationships" xmlns:p="http://schemas.openxmlformats.org/presentationml/2006/main">
   <p:cSld>
     <p:spTree>
@@ -4440,215 +5002,7 @@
 </p:sld>
 </file>
 
-<file path=ppt/slides/slide6.xml><?xml version="1.0" encoding="utf-8"?>
-<p:sld xmlns:a="http://schemas.openxmlformats.org/drawingml/2006/main" xmlns:r="http://schemas.openxmlformats.org/officeDocument/2006/relationships" xmlns:p="http://schemas.openxmlformats.org/presentationml/2006/main">
-  <p:cSld>
-    <p:spTree>
-      <p:nvGrpSpPr>
-        <p:cNvPr id="1" name=""/>
-        <p:cNvGrpSpPr/>
-        <p:nvPr/>
-      </p:nvGrpSpPr>
-      <p:grpSpPr>
-        <a:xfrm>
-          <a:off x="0" y="0"/>
-          <a:ext cx="0" cy="0"/>
-          <a:chOff x="0" y="0"/>
-          <a:chExt cx="0" cy="0"/>
-        </a:xfrm>
-      </p:grpSpPr>
-      <p:sp>
-        <p:nvSpPr>
-          <p:cNvPr id="2" name="Title 1">
-            <a:extLst>
-              <a:ext uri="{FF2B5EF4-FFF2-40B4-BE49-F238E27FC236}">
-                <a16:creationId xmlns:a16="http://schemas.microsoft.com/office/drawing/2014/main" id="{FFA7CFA6-B31B-49F9-260A-3BE29B070960}"/>
-              </a:ext>
-            </a:extLst>
-          </p:cNvPr>
-          <p:cNvSpPr>
-            <a:spLocks noGrp="1"/>
-          </p:cNvSpPr>
-          <p:nvPr>
-            <p:ph type="title"/>
-          </p:nvPr>
-        </p:nvSpPr>
-        <p:spPr/>
-        <p:txBody>
-          <a:bodyPr/>
-          <a:lstStyle/>
-          <a:p>
-            <a:r>
-              <a:rPr lang="en-US" dirty="0"/>
-              <a:t>Modularity</a:t>
-            </a:r>
-          </a:p>
-        </p:txBody>
-      </p:sp>
-      <p:sp>
-        <p:nvSpPr>
-          <p:cNvPr id="3" name="Content Placeholder 2">
-            <a:extLst>
-              <a:ext uri="{FF2B5EF4-FFF2-40B4-BE49-F238E27FC236}">
-                <a16:creationId xmlns:a16="http://schemas.microsoft.com/office/drawing/2014/main" id="{A522A2D5-CBBD-0FB0-C691-7341D5A601A5}"/>
-              </a:ext>
-            </a:extLst>
-          </p:cNvPr>
-          <p:cNvSpPr>
-            <a:spLocks noGrp="1"/>
-          </p:cNvSpPr>
-          <p:nvPr>
-            <p:ph idx="1"/>
-          </p:nvPr>
-        </p:nvSpPr>
-        <p:spPr>
-          <a:xfrm>
-            <a:off x="838200" y="1825625"/>
-            <a:ext cx="9180007" cy="4351338"/>
-          </a:xfrm>
-        </p:spPr>
-        <p:txBody>
-          <a:bodyPr>
-            <a:normAutofit lnSpcReduction="10000"/>
-          </a:bodyPr>
-          <a:lstStyle/>
-          <a:p>
-            <a:pPr marL="0" indent="0">
-              <a:buNone/>
-            </a:pPr>
-            <a:r>
-              <a:rPr lang="en-US" b="1" dirty="0"/>
-              <a:t>Modularity</a:t>
-            </a:r>
-            <a:r>
-              <a:rPr lang="en-US" dirty="0"/>
-              <a:t> is the idea of dividing a big thing into multiple small components.</a:t>
-            </a:r>
-          </a:p>
-          <a:p>
-            <a:pPr marL="0" indent="0">
-              <a:buNone/>
-            </a:pPr>
-            <a:endParaRPr lang="en-US" dirty="0"/>
-          </a:p>
-          <a:p>
-            <a:pPr marL="0" indent="0">
-              <a:buNone/>
-            </a:pPr>
-            <a:r>
-              <a:rPr lang="en-US" dirty="0"/>
-              <a:t>E.g. Lego models are designed from small bricks.</a:t>
-            </a:r>
-          </a:p>
-          <a:p>
-            <a:pPr marL="0" indent="0">
-              <a:buNone/>
-            </a:pPr>
-            <a:r>
-              <a:rPr lang="en-US" dirty="0"/>
-              <a:t>E.g. Electronics uses standard modules like wires, resistors, capacitors etc.</a:t>
-            </a:r>
-          </a:p>
-          <a:p>
-            <a:pPr marL="0" indent="0">
-              <a:buNone/>
-            </a:pPr>
-            <a:r>
-              <a:rPr lang="en-US" dirty="0"/>
-              <a:t>E.g. Computers have the CPU, main memory, I/O, etc.</a:t>
-            </a:r>
-          </a:p>
-          <a:p>
-            <a:pPr marL="0" indent="0">
-              <a:buNone/>
-            </a:pPr>
-            <a:endParaRPr lang="en-US" dirty="0"/>
-          </a:p>
-          <a:p>
-            <a:pPr marL="0" indent="0">
-              <a:buNone/>
-            </a:pPr>
-            <a:r>
-              <a:rPr lang="en-US" dirty="0"/>
-              <a:t>Finding the best way to modularize a system can be very challenging!</a:t>
-            </a:r>
-          </a:p>
-        </p:txBody>
-      </p:sp>
-      <p:pic>
-        <p:nvPicPr>
-          <p:cNvPr id="4" name="Picture 3" descr="LEGO® Parts - Brick Creation">
-            <a:extLst>
-              <a:ext uri="{FF2B5EF4-FFF2-40B4-BE49-F238E27FC236}">
-                <a16:creationId xmlns:a16="http://schemas.microsoft.com/office/drawing/2014/main" id="{F66B33F4-48A3-95DA-0585-FC0F56C5989D}"/>
-              </a:ext>
-            </a:extLst>
-          </p:cNvPr>
-          <p:cNvPicPr>
-            <a:picLocks noChangeAspect="1"/>
-          </p:cNvPicPr>
-          <p:nvPr/>
-        </p:nvPicPr>
-        <p:blipFill>
-          <a:blip r:embed="rId2"/>
-          <a:stretch>
-            <a:fillRect/>
-          </a:stretch>
-        </p:blipFill>
-        <p:spPr>
-          <a:xfrm>
-            <a:off x="10018207" y="1690688"/>
-            <a:ext cx="1965709" cy="1965709"/>
-          </a:xfrm>
-          <a:prstGeom prst="rect">
-            <a:avLst/>
-          </a:prstGeom>
-        </p:spPr>
-      </p:pic>
-      <p:pic>
-        <p:nvPicPr>
-          <p:cNvPr id="5" name="Picture 4" descr="Electronic component - Wikipedia">
-            <a:extLst>
-              <a:ext uri="{FF2B5EF4-FFF2-40B4-BE49-F238E27FC236}">
-                <a16:creationId xmlns:a16="http://schemas.microsoft.com/office/drawing/2014/main" id="{B1243D96-F2CF-0B1E-C84C-D02CA7B6506D}"/>
-              </a:ext>
-            </a:extLst>
-          </p:cNvPr>
-          <p:cNvPicPr>
-            <a:picLocks noChangeAspect="1"/>
-          </p:cNvPicPr>
-          <p:nvPr/>
-        </p:nvPicPr>
-        <p:blipFill>
-          <a:blip r:embed="rId3"/>
-          <a:stretch>
-            <a:fillRect/>
-          </a:stretch>
-        </p:blipFill>
-        <p:spPr>
-          <a:xfrm>
-            <a:off x="9651755" y="3539070"/>
-            <a:ext cx="2540245" cy="1747155"/>
-          </a:xfrm>
-          <a:prstGeom prst="rect">
-            <a:avLst/>
-          </a:prstGeom>
-        </p:spPr>
-      </p:pic>
-    </p:spTree>
-    <p:extLst>
-      <p:ext uri="{BB962C8B-B14F-4D97-AF65-F5344CB8AC3E}">
-        <p14:creationId xmlns:p14="http://schemas.microsoft.com/office/powerpoint/2010/main" val="2902054552"/>
-      </p:ext>
-    </p:extLst>
-  </p:cSld>
-  <p:clrMapOvr>
-    <a:masterClrMapping/>
-  </p:clrMapOvr>
-</p:sld>
-</file>
-
-<file path=ppt/slides/slide7.xml><?xml version="1.0" encoding="utf-8"?>
+<file path=ppt/slides/slide8.xml><?xml version="1.0" encoding="utf-8"?>
 <p:sld xmlns:a="http://schemas.openxmlformats.org/drawingml/2006/main" xmlns:r="http://schemas.openxmlformats.org/officeDocument/2006/relationships" xmlns:p="http://schemas.openxmlformats.org/presentationml/2006/main">
   <p:cSld>
     <p:spTree>
@@ -4792,133 +5146,6 @@
 </p:sld>
 </file>
 
-<file path=ppt/slides/slide8.xml><?xml version="1.0" encoding="utf-8"?>
-<p:sld xmlns:a="http://schemas.openxmlformats.org/drawingml/2006/main" xmlns:r="http://schemas.openxmlformats.org/officeDocument/2006/relationships" xmlns:p="http://schemas.openxmlformats.org/presentationml/2006/main">
-  <p:cSld>
-    <p:spTree>
-      <p:nvGrpSpPr>
-        <p:cNvPr id="1" name=""/>
-        <p:cNvGrpSpPr/>
-        <p:nvPr/>
-      </p:nvGrpSpPr>
-      <p:grpSpPr>
-        <a:xfrm>
-          <a:off x="0" y="0"/>
-          <a:ext cx="0" cy="0"/>
-          <a:chOff x="0" y="0"/>
-          <a:chExt cx="0" cy="0"/>
-        </a:xfrm>
-      </p:grpSpPr>
-      <p:sp>
-        <p:nvSpPr>
-          <p:cNvPr id="2" name="Title 1">
-            <a:extLst>
-              <a:ext uri="{FF2B5EF4-FFF2-40B4-BE49-F238E27FC236}">
-                <a16:creationId xmlns:a16="http://schemas.microsoft.com/office/drawing/2014/main" id="{20D7E91E-57BC-808B-9FF4-FE3CF1094209}"/>
-              </a:ext>
-            </a:extLst>
-          </p:cNvPr>
-          <p:cNvSpPr>
-            <a:spLocks noGrp="1"/>
-          </p:cNvSpPr>
-          <p:nvPr>
-            <p:ph type="title"/>
-          </p:nvPr>
-        </p:nvSpPr>
-        <p:spPr/>
-        <p:txBody>
-          <a:bodyPr/>
-          <a:lstStyle/>
-          <a:p>
-            <a:r>
-              <a:rPr lang="en-US" dirty="0"/>
-              <a:t>Abstraction, Encapsulation, Modularity</a:t>
-            </a:r>
-          </a:p>
-        </p:txBody>
-      </p:sp>
-      <p:sp>
-        <p:nvSpPr>
-          <p:cNvPr id="3" name="Content Placeholder 2">
-            <a:extLst>
-              <a:ext uri="{FF2B5EF4-FFF2-40B4-BE49-F238E27FC236}">
-                <a16:creationId xmlns:a16="http://schemas.microsoft.com/office/drawing/2014/main" id="{43A5F54D-348F-AB81-EB61-1C7AAA10E35E}"/>
-              </a:ext>
-            </a:extLst>
-          </p:cNvPr>
-          <p:cNvSpPr>
-            <a:spLocks noGrp="1"/>
-          </p:cNvSpPr>
-          <p:nvPr>
-            <p:ph idx="1"/>
-          </p:nvPr>
-        </p:nvSpPr>
-        <p:spPr/>
-        <p:txBody>
-          <a:bodyPr>
-            <a:normAutofit/>
-          </a:bodyPr>
-          <a:lstStyle/>
-          <a:p>
-            <a:r>
-              <a:rPr lang="en-US" dirty="0"/>
-              <a:t>These ideas work together and must be balanced against each other and practical real-world constraints</a:t>
-            </a:r>
-          </a:p>
-          <a:p>
-            <a:pPr lvl="1"/>
-            <a:r>
-              <a:rPr lang="en-US" b="1" dirty="0"/>
-              <a:t>aim for deep modules</a:t>
-            </a:r>
-            <a:r>
-              <a:rPr lang="en-US" dirty="0"/>
-              <a:t>: simple (even minimalist) public interfaces with complexity underneath</a:t>
-            </a:r>
-          </a:p>
-          <a:p>
-            <a:pPr lvl="1"/>
-            <a:r>
-              <a:rPr lang="en-US" b="1" dirty="0"/>
-              <a:t>aim for plug and play</a:t>
-            </a:r>
-            <a:r>
-              <a:rPr lang="en-US" dirty="0"/>
-              <a:t>: modules shouldn’t know about the implementation details of other modules</a:t>
-            </a:r>
-          </a:p>
-          <a:p>
-            <a:pPr lvl="1"/>
-            <a:r>
-              <a:rPr lang="en-US" b="1" dirty="0"/>
-              <a:t>aim to iterate</a:t>
-            </a:r>
-            <a:r>
-              <a:rPr lang="en-US" dirty="0"/>
-              <a:t>: plan multiple versions, learning from each one and making improvements in future ones</a:t>
-            </a:r>
-          </a:p>
-          <a:p>
-            <a:r>
-              <a:rPr lang="en-US" dirty="0"/>
-              <a:t>Among other things, good designers tend to have a lot of experience and knowledge of possible options and their pros and cons, and often need make trade-offs</a:t>
-            </a:r>
-          </a:p>
-        </p:txBody>
-      </p:sp>
-    </p:spTree>
-    <p:extLst>
-      <p:ext uri="{BB962C8B-B14F-4D97-AF65-F5344CB8AC3E}">
-        <p14:creationId xmlns:p14="http://schemas.microsoft.com/office/powerpoint/2010/main" val="3415818809"/>
-      </p:ext>
-    </p:extLst>
-  </p:cSld>
-  <p:clrMapOvr>
-    <a:masterClrMapping/>
-  </p:clrMapOvr>
-</p:sld>
-</file>
-
 <file path=ppt/slides/slide9.xml><?xml version="1.0" encoding="utf-8"?>
 <p:sld xmlns:a="http://schemas.openxmlformats.org/drawingml/2006/main" xmlns:r="http://schemas.openxmlformats.org/officeDocument/2006/relationships" xmlns:p="http://schemas.openxmlformats.org/presentationml/2006/main">
   <p:cSld>
@@ -4941,7 +5168,7 @@
           <p:cNvPr id="2" name="Title 1">
             <a:extLst>
               <a:ext uri="{FF2B5EF4-FFF2-40B4-BE49-F238E27FC236}">
-                <a16:creationId xmlns:a16="http://schemas.microsoft.com/office/drawing/2014/main" id="{3EBA8F85-96D6-E82D-7342-193135DF3D5E}"/>
+                <a16:creationId xmlns:a16="http://schemas.microsoft.com/office/drawing/2014/main" id="{20D7E91E-57BC-808B-9FF4-FE3CF1094209}"/>
               </a:ext>
             </a:extLst>
           </p:cNvPr>
@@ -4959,7 +5186,7 @@
           <a:p>
             <a:r>
               <a:rPr lang="en-US" dirty="0"/>
-              <a:t>Example: Unix File API</a:t>
+              <a:t>Abstraction, Encapsulation, Modularity</a:t>
             </a:r>
           </a:p>
         </p:txBody>
@@ -4969,7 +5196,7 @@
           <p:cNvPr id="3" name="Content Placeholder 2">
             <a:extLst>
               <a:ext uri="{FF2B5EF4-FFF2-40B4-BE49-F238E27FC236}">
-                <a16:creationId xmlns:a16="http://schemas.microsoft.com/office/drawing/2014/main" id="{7E21A46B-0A28-FA40-ECB8-861888BE3874}"/>
+                <a16:creationId xmlns:a16="http://schemas.microsoft.com/office/drawing/2014/main" id="{43A5F54D-348F-AB81-EB61-1C7AAA10E35E}"/>
               </a:ext>
             </a:extLst>
           </p:cNvPr>
@@ -4982,112 +5209,61 @@
         </p:nvSpPr>
         <p:spPr/>
         <p:txBody>
-          <a:bodyPr/>
-          <a:lstStyle/>
-          <a:p>
-            <a:pPr marL="0" indent="0">
-              <a:buNone/>
-            </a:pPr>
-            <a:r>
-              <a:rPr lang="en-US" dirty="0"/>
-              <a:t>What code should you use to read and write files?</a:t>
-            </a:r>
-          </a:p>
-          <a:p>
-            <a:pPr marL="0" indent="0">
-              <a:buNone/>
-            </a:pPr>
-            <a:r>
-              <a:rPr lang="en-US" dirty="0"/>
-              <a:t>Practically all programs use files, so how do you make everyone happy?</a:t>
-            </a:r>
-          </a:p>
-          <a:p>
-            <a:pPr marL="0" indent="0">
-              <a:buNone/>
-            </a:pPr>
-            <a:r>
-              <a:rPr lang="en-US" dirty="0"/>
-              <a:t>The Unix file API is a famously simple interface:</a:t>
-            </a:r>
-          </a:p>
-          <a:p>
-            <a:pPr marL="0" indent="0">
-              <a:buNone/>
-            </a:pPr>
+          <a:bodyPr>
+            <a:normAutofit/>
+          </a:bodyPr>
+          <a:lstStyle/>
+          <a:p>
+            <a:r>
+              <a:rPr lang="en-US" dirty="0"/>
+              <a:t>These ideas work together and must be balanced against each other and practical real-world constraints</a:t>
+            </a:r>
+          </a:p>
+          <a:p>
+            <a:pPr lvl="1"/>
             <a:r>
               <a:rPr lang="en-US" b="1" dirty="0"/>
-              <a:t>open</a:t>
-            </a:r>
-            <a:r>
-              <a:rPr lang="en-US" dirty="0"/>
-              <a:t>, </a:t>
-            </a:r>
+              <a:t>aim for deep modules</a:t>
+            </a:r>
+            <a:r>
+              <a:rPr lang="en-US" dirty="0"/>
+              <a:t>: simple (even minimalist) public interfaces with complexity underneath</a:t>
+            </a:r>
+          </a:p>
+          <a:p>
+            <a:pPr lvl="1"/>
             <a:r>
               <a:rPr lang="en-US" b="1" dirty="0"/>
-              <a:t>read</a:t>
-            </a:r>
-            <a:r>
-              <a:rPr lang="en-US" dirty="0"/>
-              <a:t>, </a:t>
-            </a:r>
+              <a:t>aim for plug and play</a:t>
+            </a:r>
+            <a:r>
+              <a:rPr lang="en-US" dirty="0"/>
+              <a:t>: modules shouldn’t know about the implementation details of other modules</a:t>
+            </a:r>
+          </a:p>
+          <a:p>
+            <a:pPr lvl="1"/>
             <a:r>
               <a:rPr lang="en-US" b="1" dirty="0"/>
-              <a:t>write</a:t>
-            </a:r>
-            <a:r>
-              <a:rPr lang="en-US" dirty="0"/>
-              <a:t>, </a:t>
-            </a:r>
-            <a:r>
-              <a:rPr lang="en-US" b="1" dirty="0" err="1"/>
-              <a:t>lseek</a:t>
-            </a:r>
-            <a:r>
-              <a:rPr lang="en-US" dirty="0"/>
-              <a:t>, </a:t>
-            </a:r>
-            <a:r>
-              <a:rPr lang="en-US" b="1" dirty="0"/>
-              <a:t>close</a:t>
-            </a:r>
-          </a:p>
-          <a:p>
-            <a:pPr marL="0" indent="0">
-              <a:buNone/>
-            </a:pPr>
-            <a:r>
-              <a:rPr lang="en-US" dirty="0"/>
-              <a:t>It has been around since the 1970s with no major change.</a:t>
-            </a:r>
-            <a:br>
-              <a:rPr lang="en-US" dirty="0"/>
-            </a:br>
-            <a:r>
-              <a:rPr lang="en-US" dirty="0"/>
-              <a:t>But the underlying implementations have changed drastically.</a:t>
-            </a:r>
-          </a:p>
-          <a:p>
-            <a:pPr marL="0" indent="0">
-              <a:buNone/>
-            </a:pPr>
-            <a:r>
-              <a:rPr lang="en-US" dirty="0"/>
-              <a:t>Think about designing an interface for files: it is not obvious that these functions work so </a:t>
-            </a:r>
-            <a:r>
-              <a:rPr lang="en-US"/>
-              <a:t>well in so many cases.</a:t>
-            </a:r>
-            <a:endParaRPr lang="en-US" dirty="0"/>
+              <a:t>aim to iterate</a:t>
+            </a:r>
+            <a:r>
+              <a:rPr lang="en-US" dirty="0"/>
+              <a:t>: plan multiple versions, learning from each one and making improvements in future ones</a:t>
+            </a:r>
+          </a:p>
+          <a:p>
+            <a:r>
+              <a:rPr lang="en-US" dirty="0"/>
+              <a:t>Among other things, good designers tend to have a lot of experience and knowledge of possible options and their pros and cons, and often need make trade-offs</a:t>
+            </a:r>
           </a:p>
         </p:txBody>
       </p:sp>
     </p:spTree>
     <p:extLst>
       <p:ext uri="{BB962C8B-B14F-4D97-AF65-F5344CB8AC3E}">
-        <p14:creationId xmlns:p14="http://schemas.microsoft.com/office/powerpoint/2010/main" val="2445586752"/>
+        <p14:creationId xmlns:p14="http://schemas.microsoft.com/office/powerpoint/2010/main" val="3415818809"/>
       </p:ext>
     </p:extLst>
   </p:cSld>

--- a/lectures/lecture30_31/oo_design.pptx
+++ b/lectures/lecture30_31/oo_design.pptx
@@ -15,6 +15,7 @@
     <p:sldId id="263" r:id="rId9"/>
     <p:sldId id="262" r:id="rId10"/>
     <p:sldId id="264" r:id="rId11"/>
+    <p:sldId id="266" r:id="rId12"/>
   </p:sldIdLst>
   <p:sldSz cx="12192000" cy="6858000"/>
   <p:notesSz cx="6858000" cy="9144000"/>
@@ -124,7 +125,7 @@
 <file path=ppt/revisionInfo.xml><?xml version="1.0" encoding="utf-8"?>
 <p1510:revInfo xmlns:a="http://schemas.openxmlformats.org/drawingml/2006/main" xmlns:r="http://schemas.openxmlformats.org/officeDocument/2006/relationships" xmlns:p1510="http://schemas.microsoft.com/office/powerpoint/2015/10/main">
   <p1510:revLst>
-    <p1510:client id="{02E5DAB5-34F3-C54E-8B14-9CDCAEAB6D27}" v="3" dt="2026-07-30T18:32:27.301"/>
+    <p1510:client id="{02E5DAB5-34F3-C54E-8B14-9CDCAEAB6D27}" v="5" dt="2026-07-31T05:25:40.308"/>
   </p1510:revLst>
 </p1510:revInfo>
 </file>
@@ -134,7 +135,7 @@
   <pc:docChgLst>
     <pc:chgData name="Toby Donaldson" userId="2e6e5431-bb17-4c41-9985-d39c50d83c73" providerId="ADAL" clId="{F31BC264-820E-54C4-A6D1-F92AF9CC222E}"/>
     <pc:docChg chg="undo redo custSel addSld delSld modSld sldOrd">
-      <pc:chgData name="Toby Donaldson" userId="2e6e5431-bb17-4c41-9985-d39c50d83c73" providerId="ADAL" clId="{F31BC264-820E-54C4-A6D1-F92AF9CC222E}" dt="2026-07-31T04:00:52.245" v="5834" actId="113"/>
+      <pc:chgData name="Toby Donaldson" userId="2e6e5431-bb17-4c41-9985-d39c50d83c73" providerId="ADAL" clId="{F31BC264-820E-54C4-A6D1-F92AF9CC222E}" dt="2026-07-31T05:26:43.679" v="6211" actId="113"/>
       <pc:docMkLst>
         <pc:docMk/>
       </pc:docMkLst>
@@ -471,6 +472,29 @@
           <pc:sldMk cId="2673447247" sldId="265"/>
         </pc:sldMkLst>
       </pc:sldChg>
+      <pc:sldChg chg="modSp new mod">
+        <pc:chgData name="Toby Donaldson" userId="2e6e5431-bb17-4c41-9985-d39c50d83c73" providerId="ADAL" clId="{F31BC264-820E-54C4-A6D1-F92AF9CC222E}" dt="2026-07-31T05:26:43.679" v="6211" actId="113"/>
+        <pc:sldMkLst>
+          <pc:docMk/>
+          <pc:sldMk cId="2139373141" sldId="266"/>
+        </pc:sldMkLst>
+        <pc:spChg chg="mod">
+          <ac:chgData name="Toby Donaldson" userId="2e6e5431-bb17-4c41-9985-d39c50d83c73" providerId="ADAL" clId="{F31BC264-820E-54C4-A6D1-F92AF9CC222E}" dt="2026-07-31T05:22:19.176" v="6042" actId="20577"/>
+          <ac:spMkLst>
+            <pc:docMk/>
+            <pc:sldMk cId="2139373141" sldId="266"/>
+            <ac:spMk id="2" creationId="{1738ED3E-D638-2391-5B70-5E9695BDF4B2}"/>
+          </ac:spMkLst>
+        </pc:spChg>
+        <pc:spChg chg="mod">
+          <ac:chgData name="Toby Donaldson" userId="2e6e5431-bb17-4c41-9985-d39c50d83c73" providerId="ADAL" clId="{F31BC264-820E-54C4-A6D1-F92AF9CC222E}" dt="2026-07-31T05:26:43.679" v="6211" actId="113"/>
+          <ac:spMkLst>
+            <pc:docMk/>
+            <pc:sldMk cId="2139373141" sldId="266"/>
+            <ac:spMk id="3" creationId="{7DDC8D7A-9221-C7DB-9F6B-14999CB4ECEA}"/>
+          </ac:spMkLst>
+        </pc:spChg>
+      </pc:sldChg>
     </pc:docChg>
   </pc:docChgLst>
   <pc:docChgLst>
@@ -3947,6 +3971,232 @@
     <p:extLst>
       <p:ext uri="{BB962C8B-B14F-4D97-AF65-F5344CB8AC3E}">
         <p14:creationId xmlns:p14="http://schemas.microsoft.com/office/powerpoint/2010/main" val="2445586752"/>
+      </p:ext>
+    </p:extLst>
+  </p:cSld>
+  <p:clrMapOvr>
+    <a:masterClrMapping/>
+  </p:clrMapOvr>
+</p:sld>
+</file>
+
+<file path=ppt/slides/slide11.xml><?xml version="1.0" encoding="utf-8"?>
+<p:sld xmlns:a="http://schemas.openxmlformats.org/drawingml/2006/main" xmlns:r="http://schemas.openxmlformats.org/officeDocument/2006/relationships" xmlns:p="http://schemas.openxmlformats.org/presentationml/2006/main">
+  <p:cSld>
+    <p:spTree>
+      <p:nvGrpSpPr>
+        <p:cNvPr id="1" name=""/>
+        <p:cNvGrpSpPr/>
+        <p:nvPr/>
+      </p:nvGrpSpPr>
+      <p:grpSpPr>
+        <a:xfrm>
+          <a:off x="0" y="0"/>
+          <a:ext cx="0" cy="0"/>
+          <a:chOff x="0" y="0"/>
+          <a:chExt cx="0" cy="0"/>
+        </a:xfrm>
+      </p:grpSpPr>
+      <p:sp>
+        <p:nvSpPr>
+          <p:cNvPr id="2" name="Title 1">
+            <a:extLst>
+              <a:ext uri="{FF2B5EF4-FFF2-40B4-BE49-F238E27FC236}">
+                <a16:creationId xmlns:a16="http://schemas.microsoft.com/office/drawing/2014/main" id="{1738ED3E-D638-2391-5B70-5E9695BDF4B2}"/>
+              </a:ext>
+            </a:extLst>
+          </p:cNvPr>
+          <p:cNvSpPr>
+            <a:spLocks noGrp="1"/>
+          </p:cNvSpPr>
+          <p:nvPr>
+            <p:ph type="title"/>
+          </p:nvPr>
+        </p:nvSpPr>
+        <p:spPr/>
+        <p:txBody>
+          <a:bodyPr/>
+          <a:lstStyle/>
+          <a:p>
+            <a:r>
+              <a:rPr lang="en-US" dirty="0"/>
+              <a:t>Example: lists</a:t>
+            </a:r>
+          </a:p>
+        </p:txBody>
+      </p:sp>
+      <p:sp>
+        <p:nvSpPr>
+          <p:cNvPr id="3" name="Content Placeholder 2">
+            <a:extLst>
+              <a:ext uri="{FF2B5EF4-FFF2-40B4-BE49-F238E27FC236}">
+                <a16:creationId xmlns:a16="http://schemas.microsoft.com/office/drawing/2014/main" id="{7DDC8D7A-9221-C7DB-9F6B-14999CB4ECEA}"/>
+              </a:ext>
+            </a:extLst>
+          </p:cNvPr>
+          <p:cNvSpPr>
+            <a:spLocks noGrp="1"/>
+          </p:cNvSpPr>
+          <p:nvPr>
+            <p:ph idx="1"/>
+          </p:nvPr>
+        </p:nvSpPr>
+        <p:spPr/>
+        <p:txBody>
+          <a:bodyPr/>
+          <a:lstStyle/>
+          <a:p>
+            <a:pPr marL="0" indent="0">
+              <a:buNone/>
+            </a:pPr>
+            <a:r>
+              <a:rPr lang="en-US" dirty="0"/>
+              <a:t>Different programming languages can have every different designs for lists … there is no one standard</a:t>
+            </a:r>
+          </a:p>
+          <a:p>
+            <a:r>
+              <a:rPr lang="en-US" dirty="0"/>
+              <a:t>E.g. </a:t>
+            </a:r>
+            <a:r>
+              <a:rPr lang="en-US" b="1" dirty="0"/>
+              <a:t>Python list </a:t>
+            </a:r>
+            <a:r>
+              <a:rPr lang="en-US" dirty="0"/>
+              <a:t>methods:</a:t>
+            </a:r>
+            <a:br>
+              <a:rPr lang="en-US" dirty="0"/>
+            </a:br>
+            <a:r>
+              <a:rPr lang="en-US" dirty="0"/>
+              <a:t>append, clear, copy, count, extend, index, insert, pop, remove, reverse, sort</a:t>
+            </a:r>
+          </a:p>
+          <a:p>
+            <a:r>
+              <a:rPr lang="en-CA" dirty="0"/>
+              <a:t>E.g. </a:t>
+            </a:r>
+            <a:r>
+              <a:rPr lang="en-CA" b="1" dirty="0"/>
+              <a:t>C++ vector </a:t>
+            </a:r>
+            <a:r>
+              <a:rPr lang="en-CA" dirty="0"/>
+              <a:t>methods:</a:t>
+            </a:r>
+            <a:br>
+              <a:rPr lang="en-CA" dirty="0"/>
+            </a:br>
+            <a:r>
+              <a:rPr lang="en-CA" dirty="0"/>
+              <a:t>assign, at, back, begin, capacity, </a:t>
+            </a:r>
+            <a:r>
+              <a:rPr lang="en-CA" dirty="0" err="1"/>
+              <a:t>cbegin</a:t>
+            </a:r>
+            <a:r>
+              <a:rPr lang="en-CA" dirty="0"/>
+              <a:t>, </a:t>
+            </a:r>
+            <a:r>
+              <a:rPr lang="en-CA" dirty="0" err="1"/>
+              <a:t>cend</a:t>
+            </a:r>
+            <a:r>
+              <a:rPr lang="en-CA" dirty="0"/>
+              <a:t>, clear, </a:t>
+            </a:r>
+            <a:r>
+              <a:rPr lang="en-CA" dirty="0" err="1"/>
+              <a:t>crbegin</a:t>
+            </a:r>
+            <a:r>
+              <a:rPr lang="en-CA" dirty="0"/>
+              <a:t>, </a:t>
+            </a:r>
+            <a:r>
+              <a:rPr lang="en-CA" dirty="0" err="1"/>
+              <a:t>crend</a:t>
+            </a:r>
+            <a:r>
+              <a:rPr lang="en-CA" dirty="0"/>
+              <a:t>, data, emplace, </a:t>
+            </a:r>
+            <a:r>
+              <a:rPr lang="en-CA" dirty="0" err="1"/>
+              <a:t>emplace_back</a:t>
+            </a:r>
+            <a:r>
+              <a:rPr lang="en-CA" dirty="0"/>
+              <a:t>, empty, end, erase, front, </a:t>
+            </a:r>
+            <a:r>
+              <a:rPr lang="en-CA" dirty="0" err="1"/>
+              <a:t>get_allocator</a:t>
+            </a:r>
+            <a:r>
+              <a:rPr lang="en-CA" dirty="0"/>
+              <a:t>, insert, </a:t>
+            </a:r>
+            <a:r>
+              <a:rPr lang="en-CA" dirty="0" err="1"/>
+              <a:t>max_size</a:t>
+            </a:r>
+            <a:r>
+              <a:rPr lang="en-CA" dirty="0"/>
+              <a:t>, operator[], operator=, </a:t>
+            </a:r>
+            <a:r>
+              <a:rPr lang="en-CA" dirty="0" err="1"/>
+              <a:t>pop_back</a:t>
+            </a:r>
+            <a:r>
+              <a:rPr lang="en-CA" dirty="0"/>
+              <a:t>, </a:t>
+            </a:r>
+            <a:r>
+              <a:rPr lang="en-CA" dirty="0" err="1"/>
+              <a:t>push_back</a:t>
+            </a:r>
+            <a:r>
+              <a:rPr lang="en-CA" dirty="0"/>
+              <a:t>, </a:t>
+            </a:r>
+            <a:r>
+              <a:rPr lang="en-CA" dirty="0" err="1"/>
+              <a:t>rbegin</a:t>
+            </a:r>
+            <a:r>
+              <a:rPr lang="en-CA" dirty="0"/>
+              <a:t>, rend, reserve, resize, </a:t>
+            </a:r>
+            <a:r>
+              <a:rPr lang="en-CA" dirty="0" err="1"/>
+              <a:t>shrink_to_fit</a:t>
+            </a:r>
+            <a:r>
+              <a:rPr lang="en-CA" dirty="0"/>
+              <a:t>, size, swap</a:t>
+            </a:r>
+            <a:endParaRPr lang="en-US" dirty="0"/>
+          </a:p>
+          <a:p>
+            <a:endParaRPr lang="en-US" dirty="0"/>
+          </a:p>
+          <a:p>
+            <a:endParaRPr lang="en-US" dirty="0"/>
+          </a:p>
+        </p:txBody>
+      </p:sp>
+    </p:spTree>
+    <p:extLst>
+      <p:ext uri="{BB962C8B-B14F-4D97-AF65-F5344CB8AC3E}">
+        <p14:creationId xmlns:p14="http://schemas.microsoft.com/office/powerpoint/2010/main" val="2139373141"/>
       </p:ext>
     </p:extLst>
   </p:cSld>
